--- a/ACMCbuck_convertersaurav.pptx
+++ b/ACMCbuck_convertersaurav.pptx
@@ -307,7 +307,7 @@
           <a:p>
             <a:fld id="{5BCAD085-E8A6-8845-BD4E-CB4CCA059FC4}" type="datetimeFigureOut">
               <a:rPr lang="en-US" smtClean="0"/>
-              <a:t>4/28/2026</a:t>
+              <a:t>9/1/2026</a:t>
             </a:fld>
             <a:endParaRPr lang="en-US"/>
           </a:p>
@@ -475,7 +475,7 @@
           <a:p>
             <a:fld id="{5BCAD085-E8A6-8845-BD4E-CB4CCA059FC4}" type="datetimeFigureOut">
               <a:rPr lang="en-US" smtClean="0"/>
-              <a:t>4/28/2026</a:t>
+              <a:t>9/1/2026</a:t>
             </a:fld>
             <a:endParaRPr lang="en-US"/>
           </a:p>
@@ -653,7 +653,7 @@
           <a:p>
             <a:fld id="{5BCAD085-E8A6-8845-BD4E-CB4CCA059FC4}" type="datetimeFigureOut">
               <a:rPr lang="en-US" smtClean="0"/>
-              <a:t>4/28/2026</a:t>
+              <a:t>9/1/2026</a:t>
             </a:fld>
             <a:endParaRPr lang="en-US"/>
           </a:p>
@@ -821,7 +821,7 @@
           <a:p>
             <a:fld id="{5BCAD085-E8A6-8845-BD4E-CB4CCA059FC4}" type="datetimeFigureOut">
               <a:rPr lang="en-US" smtClean="0"/>
-              <a:t>4/28/2026</a:t>
+              <a:t>9/1/2026</a:t>
             </a:fld>
             <a:endParaRPr lang="en-US"/>
           </a:p>
@@ -1066,7 +1066,7 @@
           <a:p>
             <a:fld id="{5BCAD085-E8A6-8845-BD4E-CB4CCA059FC4}" type="datetimeFigureOut">
               <a:rPr lang="en-US" smtClean="0"/>
-              <a:t>4/28/2026</a:t>
+              <a:t>9/1/2026</a:t>
             </a:fld>
             <a:endParaRPr lang="en-US"/>
           </a:p>
@@ -1351,7 +1351,7 @@
           <a:p>
             <a:fld id="{5BCAD085-E8A6-8845-BD4E-CB4CCA059FC4}" type="datetimeFigureOut">
               <a:rPr lang="en-US" smtClean="0"/>
-              <a:t>4/28/2026</a:t>
+              <a:t>9/1/2026</a:t>
             </a:fld>
             <a:endParaRPr lang="en-US"/>
           </a:p>
@@ -1770,7 +1770,7 @@
           <a:p>
             <a:fld id="{5BCAD085-E8A6-8845-BD4E-CB4CCA059FC4}" type="datetimeFigureOut">
               <a:rPr lang="en-US" smtClean="0"/>
-              <a:t>4/28/2026</a:t>
+              <a:t>9/1/2026</a:t>
             </a:fld>
             <a:endParaRPr lang="en-US"/>
           </a:p>
@@ -1887,7 +1887,7 @@
           <a:p>
             <a:fld id="{5BCAD085-E8A6-8845-BD4E-CB4CCA059FC4}" type="datetimeFigureOut">
               <a:rPr lang="en-US" smtClean="0"/>
-              <a:t>4/28/2026</a:t>
+              <a:t>9/1/2026</a:t>
             </a:fld>
             <a:endParaRPr lang="en-US"/>
           </a:p>
@@ -1982,7 +1982,7 @@
           <a:p>
             <a:fld id="{5BCAD085-E8A6-8845-BD4E-CB4CCA059FC4}" type="datetimeFigureOut">
               <a:rPr lang="en-US" smtClean="0"/>
-              <a:t>4/28/2026</a:t>
+              <a:t>9/1/2026</a:t>
             </a:fld>
             <a:endParaRPr lang="en-US"/>
           </a:p>
@@ -2257,7 +2257,7 @@
           <a:p>
             <a:fld id="{5BCAD085-E8A6-8845-BD4E-CB4CCA059FC4}" type="datetimeFigureOut">
               <a:rPr lang="en-US" smtClean="0"/>
-              <a:t>4/28/2026</a:t>
+              <a:t>9/1/2026</a:t>
             </a:fld>
             <a:endParaRPr lang="en-US"/>
           </a:p>
@@ -2509,7 +2509,7 @@
           <a:p>
             <a:fld id="{5BCAD085-E8A6-8845-BD4E-CB4CCA059FC4}" type="datetimeFigureOut">
               <a:rPr lang="en-US" smtClean="0"/>
-              <a:t>4/28/2026</a:t>
+              <a:t>9/1/2026</a:t>
             </a:fld>
             <a:endParaRPr lang="en-US"/>
           </a:p>
@@ -2720,7 +2720,7 @@
           <a:p>
             <a:fld id="{5BCAD085-E8A6-8845-BD4E-CB4CCA059FC4}" type="datetimeFigureOut">
               <a:rPr lang="en-US" smtClean="0"/>
-              <a:t>4/28/2026</a:t>
+              <a:t>9/1/2026</a:t>
             </a:fld>
             <a:endParaRPr lang="en-US"/>
           </a:p>
@@ -3282,7 +3282,15 @@
           <a:p>
             <a:r>
               <a:rPr lang="en-IN" dirty="0"/>
-              <a:t>Saurav Kr Yadav (25410112)</a:t>
+              <a:t>Saurav Kr Yadav </a:t>
+            </a:r>
+            <a:r>
+              <a:rPr lang="en-IN"/>
+              <a:t>(254102112</a:t>
+            </a:r>
+            <a:r>
+              <a:rPr lang="en-IN" dirty="0"/>
+              <a:t>)</a:t>
             </a:r>
           </a:p>
         </p:txBody>
